--- a/presentation/Lab3B_Executive_Briefing.pptx
+++ b/presentation/Lab3B_Executive_Briefing.pptx
@@ -2053,7 +2053,7 @@
                   <a:srgbClr val="DCE6F2"/>
                 </a:solidFill>
               </a:rPr>
-              <a:t>Chioma Ameh | C11/26/CGRCE/17567 | GRC102 Lab 3B | 29 October 2026</a:t>
+              <a:t>Chioma Ameh | C11/26/CGRCE/17567 | GRC103 Lab 3B | 29 October 2026</a:t>
             </a:r>
             <a:endParaRPr lang="en-US" sz="1200" dirty="0"/>
           </a:p>
